--- a/.lessons/58 Backend Product And Related Features/12 Product- Some modification on form and db columns/1.pptx
+++ b/.lessons/58 Backend Product And Related Features/12 Product- Some modification on form and db columns/1.pptx
@@ -5,9 +5,13 @@
     <p:sldMasterId id="2147483648" r:id="rId1"/>
   </p:sldMasterIdLst>
   <p:sldIdLst>
-    <p:sldId id="413" r:id="rId2"/>
-    <p:sldId id="414" r:id="rId3"/>
-    <p:sldId id="400" r:id="rId4"/>
+    <p:sldId id="421" r:id="rId2"/>
+    <p:sldId id="422" r:id="rId3"/>
+    <p:sldId id="423" r:id="rId4"/>
+    <p:sldId id="424" r:id="rId5"/>
+    <p:sldId id="413" r:id="rId6"/>
+    <p:sldId id="414" r:id="rId7"/>
+    <p:sldId id="400" r:id="rId8"/>
   </p:sldIdLst>
   <p:sldSz cx="12192000" cy="6858000"/>
   <p:notesSz cx="6858000" cy="9144000"/>
@@ -261,7 +265,7 @@
           <a:p>
             <a:fld id="{3E102D2E-813C-461C-9963-687A650C48C0}" type="datetimeFigureOut">
               <a:rPr lang="en-US" smtClean="0"/>
-              <a:t>6/26/2025</a:t>
+              <a:t>10/7/2025</a:t>
             </a:fld>
             <a:endParaRPr lang="en-US"/>
           </a:p>
@@ -459,7 +463,7 @@
           <a:p>
             <a:fld id="{3E102D2E-813C-461C-9963-687A650C48C0}" type="datetimeFigureOut">
               <a:rPr lang="en-US" smtClean="0"/>
-              <a:t>6/26/2025</a:t>
+              <a:t>10/7/2025</a:t>
             </a:fld>
             <a:endParaRPr lang="en-US"/>
           </a:p>
@@ -667,7 +671,7 @@
           <a:p>
             <a:fld id="{3E102D2E-813C-461C-9963-687A650C48C0}" type="datetimeFigureOut">
               <a:rPr lang="en-US" smtClean="0"/>
-              <a:t>6/26/2025</a:t>
+              <a:t>10/7/2025</a:t>
             </a:fld>
             <a:endParaRPr lang="en-US"/>
           </a:p>
@@ -865,7 +869,7 @@
           <a:p>
             <a:fld id="{3E102D2E-813C-461C-9963-687A650C48C0}" type="datetimeFigureOut">
               <a:rPr lang="en-US" smtClean="0"/>
-              <a:t>6/26/2025</a:t>
+              <a:t>10/7/2025</a:t>
             </a:fld>
             <a:endParaRPr lang="en-US"/>
           </a:p>
@@ -1140,7 +1144,7 @@
           <a:p>
             <a:fld id="{3E102D2E-813C-461C-9963-687A650C48C0}" type="datetimeFigureOut">
               <a:rPr lang="en-US" smtClean="0"/>
-              <a:t>6/26/2025</a:t>
+              <a:t>10/7/2025</a:t>
             </a:fld>
             <a:endParaRPr lang="en-US"/>
           </a:p>
@@ -1405,7 +1409,7 @@
           <a:p>
             <a:fld id="{3E102D2E-813C-461C-9963-687A650C48C0}" type="datetimeFigureOut">
               <a:rPr lang="en-US" smtClean="0"/>
-              <a:t>6/26/2025</a:t>
+              <a:t>10/7/2025</a:t>
             </a:fld>
             <a:endParaRPr lang="en-US"/>
           </a:p>
@@ -1817,7 +1821,7 @@
           <a:p>
             <a:fld id="{3E102D2E-813C-461C-9963-687A650C48C0}" type="datetimeFigureOut">
               <a:rPr lang="en-US" smtClean="0"/>
-              <a:t>6/26/2025</a:t>
+              <a:t>10/7/2025</a:t>
             </a:fld>
             <a:endParaRPr lang="en-US"/>
           </a:p>
@@ -1958,7 +1962,7 @@
           <a:p>
             <a:fld id="{3E102D2E-813C-461C-9963-687A650C48C0}" type="datetimeFigureOut">
               <a:rPr lang="en-US" smtClean="0"/>
-              <a:t>6/26/2025</a:t>
+              <a:t>10/7/2025</a:t>
             </a:fld>
             <a:endParaRPr lang="en-US"/>
           </a:p>
@@ -2071,7 +2075,7 @@
           <a:p>
             <a:fld id="{3E102D2E-813C-461C-9963-687A650C48C0}" type="datetimeFigureOut">
               <a:rPr lang="en-US" smtClean="0"/>
-              <a:t>6/26/2025</a:t>
+              <a:t>10/7/2025</a:t>
             </a:fld>
             <a:endParaRPr lang="en-US"/>
           </a:p>
@@ -2382,7 +2386,7 @@
           <a:p>
             <a:fld id="{3E102D2E-813C-461C-9963-687A650C48C0}" type="datetimeFigureOut">
               <a:rPr lang="en-US" smtClean="0"/>
-              <a:t>6/26/2025</a:t>
+              <a:t>10/7/2025</a:t>
             </a:fld>
             <a:endParaRPr lang="en-US"/>
           </a:p>
@@ -2670,7 +2674,7 @@
           <a:p>
             <a:fld id="{3E102D2E-813C-461C-9963-687A650C48C0}" type="datetimeFigureOut">
               <a:rPr lang="en-US" smtClean="0"/>
-              <a:t>6/26/2025</a:t>
+              <a:t>10/7/2025</a:t>
             </a:fld>
             <a:endParaRPr lang="en-US"/>
           </a:p>
@@ -2911,7 +2915,7 @@
           <a:p>
             <a:fld id="{3E102D2E-813C-461C-9963-687A650C48C0}" type="datetimeFigureOut">
               <a:rPr lang="en-US" smtClean="0"/>
-              <a:t>6/26/2025</a:t>
+              <a:t>10/7/2025</a:t>
             </a:fld>
             <a:endParaRPr lang="en-US"/>
           </a:p>
@@ -3319,6 +3323,632 @@
         <p:cNvPr id="1" name="">
           <a:extLst>
             <a:ext uri="{FF2B5EF4-FFF2-40B4-BE49-F238E27FC236}">
+              <a16:creationId xmlns:a16="http://schemas.microsoft.com/office/drawing/2014/main" id="{AACBB3AB-DB04-90EA-2D74-9FA10C6194F8}"/>
+            </a:ext>
+          </a:extLst>
+        </p:cNvPr>
+        <p:cNvGrpSpPr/>
+        <p:nvPr/>
+      </p:nvGrpSpPr>
+      <p:grpSpPr>
+        <a:xfrm>
+          <a:off x="0" y="0"/>
+          <a:ext cx="0" cy="0"/>
+          <a:chOff x="0" y="0"/>
+          <a:chExt cx="0" cy="0"/>
+        </a:xfrm>
+      </p:grpSpPr>
+      <p:sp>
+        <p:nvSpPr>
+          <p:cNvPr id="3" name="TextBox 2">
+            <a:extLst>
+              <a:ext uri="{FF2B5EF4-FFF2-40B4-BE49-F238E27FC236}">
+                <a16:creationId xmlns:a16="http://schemas.microsoft.com/office/drawing/2014/main" id="{B16963DC-1C43-355B-80DC-71404580B0B9}"/>
+              </a:ext>
+            </a:extLst>
+          </p:cNvPr>
+          <p:cNvSpPr txBox="1"/>
+          <p:nvPr/>
+        </p:nvSpPr>
+        <p:spPr>
+          <a:xfrm>
+            <a:off x="217714" y="153446"/>
+            <a:ext cx="11756571" cy="1855764"/>
+          </a:xfrm>
+          <a:prstGeom prst="rect">
+            <a:avLst/>
+          </a:prstGeom>
+          <a:noFill/>
+        </p:spPr>
+        <p:txBody>
+          <a:bodyPr wrap="square">
+            <a:spAutoFit/>
+          </a:bodyPr>
+          <a:lstStyle/>
+          <a:p>
+            <a:pPr>
+              <a:lnSpc>
+                <a:spcPct val="150000"/>
+              </a:lnSpc>
+            </a:pPr>
+            <a:r>
+              <a:rPr kumimoji="0" lang="az-Latn-AZ" altLang="en-US" sz="1300" b="1" i="0" u="none" strike="noStrike" cap="none" normalizeH="0" baseline="0">
+                <a:ln>
+                  <a:noFill/>
+                </a:ln>
+                <a:solidFill>
+                  <a:schemeClr val="tx1"/>
+                </a:solidFill>
+                <a:effectLst/>
+                <a:latin typeface="Arial" panose="020B0604020202020204" pitchFamily="34" charset="0"/>
+              </a:rPr>
+              <a:t>is_top,     is_best</a:t>
+            </a:r>
+            <a:r>
+              <a:rPr lang="az-Latn-AZ" altLang="en-US" sz="1300" b="1">
+                <a:latin typeface="Arial" panose="020B0604020202020204" pitchFamily="34" charset="0"/>
+              </a:rPr>
+              <a:t>,     </a:t>
+            </a:r>
+            <a:r>
+              <a:rPr kumimoji="0" lang="az-Latn-AZ" altLang="en-US" sz="1300" b="1" i="0" u="none" strike="noStrike" cap="none" normalizeH="0" baseline="0">
+                <a:ln>
+                  <a:noFill/>
+                </a:ln>
+                <a:solidFill>
+                  <a:schemeClr val="tx1"/>
+                </a:solidFill>
+                <a:effectLst/>
+                <a:latin typeface="Arial" panose="020B0604020202020204" pitchFamily="34" charset="0"/>
+              </a:rPr>
+              <a:t>is_featured    </a:t>
+            </a:r>
+            <a:r>
+              <a:rPr kumimoji="0" lang="az-Latn-AZ" altLang="en-US" sz="1300" b="0" i="0" u="none" strike="noStrike" cap="none" normalizeH="0" baseline="0">
+                <a:ln>
+                  <a:noFill/>
+                </a:ln>
+                <a:solidFill>
+                  <a:schemeClr val="tx1"/>
+                </a:solidFill>
+                <a:effectLst/>
+                <a:latin typeface="Arial" panose="020B0604020202020204" pitchFamily="34" charset="0"/>
+              </a:rPr>
+              <a:t>adlı elementləri  `</a:t>
+            </a:r>
+            <a:r>
+              <a:rPr lang="en-US" sz="1300" b="1"/>
+              <a:t>Product Type</a:t>
+            </a:r>
+            <a:r>
+              <a:rPr kumimoji="0" lang="az-Latn-AZ" altLang="en-US" sz="1300" b="0" i="0" u="none" strike="noStrike" cap="none" normalizeH="0" baseline="0">
+                <a:ln>
+                  <a:noFill/>
+                </a:ln>
+                <a:solidFill>
+                  <a:schemeClr val="tx1"/>
+                </a:solidFill>
+                <a:effectLst/>
+                <a:latin typeface="Arial" panose="020B0604020202020204" pitchFamily="34" charset="0"/>
+              </a:rPr>
+              <a:t>` adı verdiyimiz select elementi ilə əvəz edə bilərik.</a:t>
+            </a:r>
+            <a:r>
+              <a:rPr kumimoji="0" lang="en-US" altLang="en-US" sz="1300" b="0" i="0" u="none" strike="noStrike" cap="none" normalizeH="0" baseline="0">
+                <a:ln>
+                  <a:noFill/>
+                </a:ln>
+                <a:solidFill>
+                  <a:schemeClr val="tx1"/>
+                </a:solidFill>
+                <a:effectLst/>
+                <a:latin typeface="Arial" panose="020B0604020202020204" pitchFamily="34" charset="0"/>
+              </a:rPr>
+              <a:t> Bunun </a:t>
+            </a:r>
+            <a:r>
+              <a:rPr kumimoji="0" lang="az-Latn-AZ" altLang="en-US" sz="1300" b="0" i="0" u="none" strike="noStrike" cap="none" normalizeH="0" baseline="0">
+                <a:ln>
+                  <a:noFill/>
+                </a:ln>
+                <a:solidFill>
+                  <a:schemeClr val="tx1"/>
+                </a:solidFill>
+                <a:effectLst/>
+                <a:latin typeface="Arial" panose="020B0604020202020204" pitchFamily="34" charset="0"/>
+              </a:rPr>
+              <a:t>üçün 3 faylda dəyişiklik edirik:</a:t>
+            </a:r>
+          </a:p>
+          <a:p>
+            <a:pPr marL="285750" indent="-285750">
+              <a:lnSpc>
+                <a:spcPct val="200000"/>
+              </a:lnSpc>
+              <a:buFont typeface="Wingdings" panose="05000000000000000000" pitchFamily="2" charset="2"/>
+              <a:buChar char="q"/>
+            </a:pPr>
+            <a:r>
+              <a:rPr lang="en-US" altLang="en-US" sz="1300">
+                <a:latin typeface="Arial" panose="020B0604020202020204" pitchFamily="34" charset="0"/>
+              </a:rPr>
+              <a:t>resources\views\admin\product\create.blade.php</a:t>
+            </a:r>
+            <a:endParaRPr lang="az-Latn-AZ" altLang="en-US" sz="1300">
+              <a:latin typeface="Arial" panose="020B0604020202020204" pitchFamily="34" charset="0"/>
+            </a:endParaRPr>
+          </a:p>
+          <a:p>
+            <a:pPr marL="285750" indent="-285750">
+              <a:lnSpc>
+                <a:spcPct val="200000"/>
+              </a:lnSpc>
+              <a:buFont typeface="Wingdings" panose="05000000000000000000" pitchFamily="2" charset="2"/>
+              <a:buChar char="q"/>
+            </a:pPr>
+            <a:r>
+              <a:rPr lang="en-US" altLang="en-US" sz="1300">
+                <a:latin typeface="Arial" panose="020B0604020202020204" pitchFamily="34" charset="0"/>
+              </a:rPr>
+              <a:t>database\migrations\2025_09_09_141731_create_products_table.php</a:t>
+            </a:r>
+            <a:endParaRPr lang="az-Latn-AZ" altLang="en-US" sz="1300">
+              <a:latin typeface="Arial" panose="020B0604020202020204" pitchFamily="34" charset="0"/>
+            </a:endParaRPr>
+          </a:p>
+          <a:p>
+            <a:pPr marL="285750" indent="-285750">
+              <a:lnSpc>
+                <a:spcPct val="200000"/>
+              </a:lnSpc>
+              <a:buFont typeface="Wingdings" panose="05000000000000000000" pitchFamily="2" charset="2"/>
+              <a:buChar char="q"/>
+            </a:pPr>
+            <a:r>
+              <a:rPr lang="en-US" altLang="en-US" sz="1300">
+                <a:latin typeface="Arial" panose="020B0604020202020204" pitchFamily="34" charset="0"/>
+              </a:rPr>
+              <a:t>app\Http\Controllers\Backend\ProductController.php</a:t>
+            </a:r>
+            <a:endParaRPr lang="az-Latn-AZ" altLang="en-US" sz="1300">
+              <a:latin typeface="Arial" panose="020B0604020202020204" pitchFamily="34" charset="0"/>
+            </a:endParaRPr>
+          </a:p>
+          <a:p>
+            <a:pPr>
+              <a:lnSpc>
+                <a:spcPct val="150000"/>
+              </a:lnSpc>
+            </a:pPr>
+            <a:endParaRPr kumimoji="0" lang="en-US" altLang="en-US" sz="1300" b="0" i="0" u="none" strike="noStrike" cap="none" normalizeH="0" baseline="0">
+              <a:ln>
+                <a:noFill/>
+              </a:ln>
+              <a:solidFill>
+                <a:schemeClr val="tx1"/>
+              </a:solidFill>
+              <a:effectLst/>
+              <a:latin typeface="Arial" panose="020B0604020202020204" pitchFamily="34" charset="0"/>
+            </a:endParaRPr>
+          </a:p>
+        </p:txBody>
+      </p:sp>
+      <p:pic>
+        <p:nvPicPr>
+          <p:cNvPr id="4" name="Picture 3">
+            <a:extLst>
+              <a:ext uri="{FF2B5EF4-FFF2-40B4-BE49-F238E27FC236}">
+                <a16:creationId xmlns:a16="http://schemas.microsoft.com/office/drawing/2014/main" id="{BD92888D-3D18-F3EA-99EB-B8189AD4CD5A}"/>
+              </a:ext>
+            </a:extLst>
+          </p:cNvPr>
+          <p:cNvPicPr>
+            <a:picLocks noChangeAspect="1"/>
+          </p:cNvPicPr>
+          <p:nvPr/>
+        </p:nvPicPr>
+        <p:blipFill>
+          <a:blip r:embed="rId2"/>
+          <a:stretch>
+            <a:fillRect/>
+          </a:stretch>
+        </p:blipFill>
+        <p:spPr>
+          <a:xfrm>
+            <a:off x="3173596" y="2262908"/>
+            <a:ext cx="9018404" cy="4595091"/>
+          </a:xfrm>
+          <a:prstGeom prst="rect">
+            <a:avLst/>
+          </a:prstGeom>
+        </p:spPr>
+      </p:pic>
+    </p:spTree>
+    <p:extLst>
+      <p:ext uri="{BB962C8B-B14F-4D97-AF65-F5344CB8AC3E}">
+        <p14:creationId xmlns:p14="http://schemas.microsoft.com/office/powerpoint/2010/main" val="566964335"/>
+      </p:ext>
+    </p:extLst>
+  </p:cSld>
+  <p:clrMapOvr>
+    <a:masterClrMapping/>
+  </p:clrMapOvr>
+</p:sld>
+</file>
+
+<file path=ppt/slides/slide2.xml><?xml version="1.0" encoding="utf-8"?>
+<p:sld xmlns:a="http://schemas.openxmlformats.org/drawingml/2006/main" xmlns:r="http://schemas.openxmlformats.org/officeDocument/2006/relationships" xmlns:p="http://schemas.openxmlformats.org/presentationml/2006/main">
+  <p:cSld>
+    <p:spTree>
+      <p:nvGrpSpPr>
+        <p:cNvPr id="1" name="">
+          <a:extLst>
+            <a:ext uri="{FF2B5EF4-FFF2-40B4-BE49-F238E27FC236}">
+              <a16:creationId xmlns:a16="http://schemas.microsoft.com/office/drawing/2014/main" id="{1B69C7FC-6703-220C-444A-A1EDFFD5D16D}"/>
+            </a:ext>
+          </a:extLst>
+        </p:cNvPr>
+        <p:cNvGrpSpPr/>
+        <p:nvPr/>
+      </p:nvGrpSpPr>
+      <p:grpSpPr>
+        <a:xfrm>
+          <a:off x="0" y="0"/>
+          <a:ext cx="0" cy="0"/>
+          <a:chOff x="0" y="0"/>
+          <a:chExt cx="0" cy="0"/>
+        </a:xfrm>
+      </p:grpSpPr>
+      <p:sp>
+        <p:nvSpPr>
+          <p:cNvPr id="3" name="TextBox 2">
+            <a:extLst>
+              <a:ext uri="{FF2B5EF4-FFF2-40B4-BE49-F238E27FC236}">
+                <a16:creationId xmlns:a16="http://schemas.microsoft.com/office/drawing/2014/main" id="{FD6C29C1-FAAC-3873-41E8-1270D64FF4E1}"/>
+              </a:ext>
+            </a:extLst>
+          </p:cNvPr>
+          <p:cNvSpPr txBox="1"/>
+          <p:nvPr/>
+        </p:nvSpPr>
+        <p:spPr>
+          <a:xfrm>
+            <a:off x="217714" y="255046"/>
+            <a:ext cx="11756571" cy="355354"/>
+          </a:xfrm>
+          <a:prstGeom prst="rect">
+            <a:avLst/>
+          </a:prstGeom>
+          <a:noFill/>
+        </p:spPr>
+        <p:txBody>
+          <a:bodyPr wrap="square">
+            <a:spAutoFit/>
+          </a:bodyPr>
+          <a:lstStyle/>
+          <a:p>
+            <a:pPr>
+              <a:lnSpc>
+                <a:spcPct val="150000"/>
+              </a:lnSpc>
+              <a:buNone/>
+            </a:pPr>
+            <a:r>
+              <a:rPr lang="az-Latn-AZ" altLang="en-US" sz="1300">
+                <a:latin typeface="Arial" panose="020B0604020202020204" pitchFamily="34" charset="0"/>
+              </a:rPr>
+              <a:t>Dəyişikliklərdən sonra tətbiqi yenidən test edirik.</a:t>
+            </a:r>
+            <a:endParaRPr kumimoji="0" lang="en-US" altLang="en-US" sz="1300" b="0" i="0" u="none" strike="noStrike" cap="none" normalizeH="0" baseline="0">
+              <a:ln>
+                <a:noFill/>
+              </a:ln>
+              <a:solidFill>
+                <a:schemeClr val="tx1"/>
+              </a:solidFill>
+              <a:effectLst/>
+              <a:latin typeface="Arial" panose="020B0604020202020204" pitchFamily="34" charset="0"/>
+            </a:endParaRPr>
+          </a:p>
+        </p:txBody>
+      </p:sp>
+      <p:pic>
+        <p:nvPicPr>
+          <p:cNvPr id="4" name="Picture 3">
+            <a:extLst>
+              <a:ext uri="{FF2B5EF4-FFF2-40B4-BE49-F238E27FC236}">
+                <a16:creationId xmlns:a16="http://schemas.microsoft.com/office/drawing/2014/main" id="{F1470050-F5CE-D38D-D092-64F53E7CAA42}"/>
+              </a:ext>
+            </a:extLst>
+          </p:cNvPr>
+          <p:cNvPicPr>
+            <a:picLocks noChangeAspect="1"/>
+          </p:cNvPicPr>
+          <p:nvPr/>
+        </p:nvPicPr>
+        <p:blipFill>
+          <a:blip r:embed="rId2"/>
+          <a:stretch>
+            <a:fillRect/>
+          </a:stretch>
+        </p:blipFill>
+        <p:spPr>
+          <a:xfrm>
+            <a:off x="0" y="892243"/>
+            <a:ext cx="12192000" cy="5965757"/>
+          </a:xfrm>
+          <a:prstGeom prst="rect">
+            <a:avLst/>
+          </a:prstGeom>
+        </p:spPr>
+      </p:pic>
+    </p:spTree>
+    <p:extLst>
+      <p:ext uri="{BB962C8B-B14F-4D97-AF65-F5344CB8AC3E}">
+        <p14:creationId xmlns:p14="http://schemas.microsoft.com/office/powerpoint/2010/main" val="1617851673"/>
+      </p:ext>
+    </p:extLst>
+  </p:cSld>
+  <p:clrMapOvr>
+    <a:masterClrMapping/>
+  </p:clrMapOvr>
+</p:sld>
+</file>
+
+<file path=ppt/slides/slide3.xml><?xml version="1.0" encoding="utf-8"?>
+<p:sld xmlns:a="http://schemas.openxmlformats.org/drawingml/2006/main" xmlns:r="http://schemas.openxmlformats.org/officeDocument/2006/relationships" xmlns:p="http://schemas.openxmlformats.org/presentationml/2006/main">
+  <p:cSld>
+    <p:spTree>
+      <p:nvGrpSpPr>
+        <p:cNvPr id="1" name="">
+          <a:extLst>
+            <a:ext uri="{FF2B5EF4-FFF2-40B4-BE49-F238E27FC236}">
+              <a16:creationId xmlns:a16="http://schemas.microsoft.com/office/drawing/2014/main" id="{26DF1ECF-6E1C-0EC3-86D0-EB32AEC2F0F7}"/>
+            </a:ext>
+          </a:extLst>
+        </p:cNvPr>
+        <p:cNvGrpSpPr/>
+        <p:nvPr/>
+      </p:nvGrpSpPr>
+      <p:grpSpPr>
+        <a:xfrm>
+          <a:off x="0" y="0"/>
+          <a:ext cx="0" cy="0"/>
+          <a:chOff x="0" y="0"/>
+          <a:chExt cx="0" cy="0"/>
+        </a:xfrm>
+      </p:grpSpPr>
+      <p:sp>
+        <p:nvSpPr>
+          <p:cNvPr id="3" name="TextBox 2">
+            <a:extLst>
+              <a:ext uri="{FF2B5EF4-FFF2-40B4-BE49-F238E27FC236}">
+                <a16:creationId xmlns:a16="http://schemas.microsoft.com/office/drawing/2014/main" id="{6909419F-9746-1873-CB0D-AF2DA8CC005D}"/>
+              </a:ext>
+            </a:extLst>
+          </p:cNvPr>
+          <p:cNvSpPr txBox="1"/>
+          <p:nvPr/>
+        </p:nvSpPr>
+        <p:spPr>
+          <a:xfrm>
+            <a:off x="217714" y="255046"/>
+            <a:ext cx="11756571" cy="355354"/>
+          </a:xfrm>
+          <a:prstGeom prst="rect">
+            <a:avLst/>
+          </a:prstGeom>
+          <a:noFill/>
+        </p:spPr>
+        <p:txBody>
+          <a:bodyPr wrap="square">
+            <a:spAutoFit/>
+          </a:bodyPr>
+          <a:lstStyle/>
+          <a:p>
+            <a:pPr>
+              <a:lnSpc>
+                <a:spcPct val="150000"/>
+              </a:lnSpc>
+              <a:buNone/>
+            </a:pPr>
+            <a:r>
+              <a:rPr kumimoji="0" lang="en-US" altLang="en-US" sz="1300" b="0" i="0" u="none" strike="noStrike" cap="none" normalizeH="0" baseline="0">
+                <a:ln>
+                  <a:noFill/>
+                </a:ln>
+                <a:solidFill>
+                  <a:schemeClr val="tx1"/>
+                </a:solidFill>
+                <a:effectLst/>
+                <a:latin typeface="Arial" panose="020B0604020202020204" pitchFamily="34" charset="0"/>
+              </a:rPr>
+              <a:t>.</a:t>
+            </a:r>
+          </a:p>
+        </p:txBody>
+      </p:sp>
+      <p:pic>
+        <p:nvPicPr>
+          <p:cNvPr id="4" name="Picture 3">
+            <a:extLst>
+              <a:ext uri="{FF2B5EF4-FFF2-40B4-BE49-F238E27FC236}">
+                <a16:creationId xmlns:a16="http://schemas.microsoft.com/office/drawing/2014/main" id="{3708DD6B-5129-867D-6A59-84FD7D61FDB1}"/>
+              </a:ext>
+            </a:extLst>
+          </p:cNvPr>
+          <p:cNvPicPr>
+            <a:picLocks noChangeAspect="1"/>
+          </p:cNvPicPr>
+          <p:nvPr/>
+        </p:nvPicPr>
+        <p:blipFill>
+          <a:blip r:embed="rId2"/>
+          <a:stretch>
+            <a:fillRect/>
+          </a:stretch>
+        </p:blipFill>
+        <p:spPr>
+          <a:xfrm>
+            <a:off x="0" y="3179434"/>
+            <a:ext cx="12192000" cy="3678566"/>
+          </a:xfrm>
+          <a:prstGeom prst="rect">
+            <a:avLst/>
+          </a:prstGeom>
+        </p:spPr>
+      </p:pic>
+    </p:spTree>
+    <p:extLst>
+      <p:ext uri="{BB962C8B-B14F-4D97-AF65-F5344CB8AC3E}">
+        <p14:creationId xmlns:p14="http://schemas.microsoft.com/office/powerpoint/2010/main" val="740533459"/>
+      </p:ext>
+    </p:extLst>
+  </p:cSld>
+  <p:clrMapOvr>
+    <a:masterClrMapping/>
+  </p:clrMapOvr>
+</p:sld>
+</file>
+
+<file path=ppt/slides/slide4.xml><?xml version="1.0" encoding="utf-8"?>
+<p:sld xmlns:a="http://schemas.openxmlformats.org/drawingml/2006/main" xmlns:r="http://schemas.openxmlformats.org/officeDocument/2006/relationships" xmlns:p="http://schemas.openxmlformats.org/presentationml/2006/main">
+  <p:cSld>
+    <p:spTree>
+      <p:nvGrpSpPr>
+        <p:cNvPr id="1" name="">
+          <a:extLst>
+            <a:ext uri="{FF2B5EF4-FFF2-40B4-BE49-F238E27FC236}">
+              <a16:creationId xmlns:a16="http://schemas.microsoft.com/office/drawing/2014/main" id="{6575DE81-0325-A99E-911A-74D430392E51}"/>
+            </a:ext>
+          </a:extLst>
+        </p:cNvPr>
+        <p:cNvGrpSpPr/>
+        <p:nvPr/>
+      </p:nvGrpSpPr>
+      <p:grpSpPr>
+        <a:xfrm>
+          <a:off x="0" y="0"/>
+          <a:ext cx="0" cy="0"/>
+          <a:chOff x="0" y="0"/>
+          <a:chExt cx="0" cy="0"/>
+        </a:xfrm>
+      </p:grpSpPr>
+      <p:sp>
+        <p:nvSpPr>
+          <p:cNvPr id="3" name="TextBox 2">
+            <a:extLst>
+              <a:ext uri="{FF2B5EF4-FFF2-40B4-BE49-F238E27FC236}">
+                <a16:creationId xmlns:a16="http://schemas.microsoft.com/office/drawing/2014/main" id="{E75E7F19-836E-C130-BD2F-1A90F3BF412C}"/>
+              </a:ext>
+            </a:extLst>
+          </p:cNvPr>
+          <p:cNvSpPr txBox="1"/>
+          <p:nvPr/>
+        </p:nvSpPr>
+        <p:spPr>
+          <a:xfrm>
+            <a:off x="217714" y="255046"/>
+            <a:ext cx="11756571" cy="355354"/>
+          </a:xfrm>
+          <a:prstGeom prst="rect">
+            <a:avLst/>
+          </a:prstGeom>
+          <a:noFill/>
+        </p:spPr>
+        <p:txBody>
+          <a:bodyPr wrap="square">
+            <a:spAutoFit/>
+          </a:bodyPr>
+          <a:lstStyle/>
+          <a:p>
+            <a:pPr>
+              <a:lnSpc>
+                <a:spcPct val="150000"/>
+              </a:lnSpc>
+              <a:buNone/>
+            </a:pPr>
+            <a:r>
+              <a:rPr kumimoji="0" lang="en-US" altLang="en-US" sz="1300" b="0" i="0" u="none" strike="noStrike" cap="none" normalizeH="0" baseline="0">
+                <a:ln>
+                  <a:noFill/>
+                </a:ln>
+                <a:solidFill>
+                  <a:schemeClr val="tx1"/>
+                </a:solidFill>
+                <a:effectLst/>
+                <a:latin typeface="Arial" panose="020B0604020202020204" pitchFamily="34" charset="0"/>
+              </a:rPr>
+              <a:t>.</a:t>
+            </a:r>
+          </a:p>
+        </p:txBody>
+      </p:sp>
+      <p:pic>
+        <p:nvPicPr>
+          <p:cNvPr id="4" name="Picture 3">
+            <a:extLst>
+              <a:ext uri="{FF2B5EF4-FFF2-40B4-BE49-F238E27FC236}">
+                <a16:creationId xmlns:a16="http://schemas.microsoft.com/office/drawing/2014/main" id="{870AEABD-28A8-14F9-D59C-0C60B3F33F07}"/>
+              </a:ext>
+            </a:extLst>
+          </p:cNvPr>
+          <p:cNvPicPr>
+            <a:picLocks noChangeAspect="1"/>
+          </p:cNvPicPr>
+          <p:nvPr/>
+        </p:nvPicPr>
+        <p:blipFill>
+          <a:blip r:embed="rId2"/>
+          <a:stretch>
+            <a:fillRect/>
+          </a:stretch>
+        </p:blipFill>
+        <p:spPr>
+          <a:xfrm>
+            <a:off x="0" y="2355291"/>
+            <a:ext cx="12192000" cy="2147418"/>
+          </a:xfrm>
+          <a:prstGeom prst="rect">
+            <a:avLst/>
+          </a:prstGeom>
+          <a:ln w="38100" cap="sq">
+            <a:solidFill>
+              <a:srgbClr val="000000"/>
+            </a:solidFill>
+            <a:prstDash val="solid"/>
+            <a:miter lim="800000"/>
+          </a:ln>
+          <a:effectLst>
+            <a:outerShdw blurRad="50800" dist="38100" dir="2700000" algn="tl" rotWithShape="0">
+              <a:srgbClr val="000000">
+                <a:alpha val="43000"/>
+              </a:srgbClr>
+            </a:outerShdw>
+          </a:effectLst>
+        </p:spPr>
+      </p:pic>
+    </p:spTree>
+    <p:extLst>
+      <p:ext uri="{BB962C8B-B14F-4D97-AF65-F5344CB8AC3E}">
+        <p14:creationId xmlns:p14="http://schemas.microsoft.com/office/powerpoint/2010/main" val="502035652"/>
+      </p:ext>
+    </p:extLst>
+  </p:cSld>
+  <p:clrMapOvr>
+    <a:masterClrMapping/>
+  </p:clrMapOvr>
+</p:sld>
+</file>
+
+<file path=ppt/slides/slide5.xml><?xml version="1.0" encoding="utf-8"?>
+<p:sld xmlns:a="http://schemas.openxmlformats.org/drawingml/2006/main" xmlns:r="http://schemas.openxmlformats.org/officeDocument/2006/relationships" xmlns:p="http://schemas.openxmlformats.org/presentationml/2006/main">
+  <p:cSld>
+    <p:spTree>
+      <p:nvGrpSpPr>
+        <p:cNvPr id="1" name="">
+          <a:extLst>
+            <a:ext uri="{FF2B5EF4-FFF2-40B4-BE49-F238E27FC236}">
               <a16:creationId xmlns:a16="http://schemas.microsoft.com/office/drawing/2014/main" id="{6A435CBA-29A4-BFD2-CEA7-3290D85ED9F8}"/>
             </a:ext>
           </a:extLst>
@@ -3397,7 +4027,7 @@
 </p:sld>
 </file>
 
-<file path=ppt/slides/slide2.xml><?xml version="1.0" encoding="utf-8"?>
+<file path=ppt/slides/slide6.xml><?xml version="1.0" encoding="utf-8"?>
 <p:sld xmlns:a="http://schemas.openxmlformats.org/drawingml/2006/main" xmlns:r="http://schemas.openxmlformats.org/officeDocument/2006/relationships" xmlns:p="http://schemas.openxmlformats.org/presentationml/2006/main">
   <p:cSld>
     <p:spTree>
@@ -3483,7 +4113,7 @@
 </p:sld>
 </file>
 
-<file path=ppt/slides/slide3.xml><?xml version="1.0" encoding="utf-8"?>
+<file path=ppt/slides/slide7.xml><?xml version="1.0" encoding="utf-8"?>
 <p:sld xmlns:a="http://schemas.openxmlformats.org/drawingml/2006/main" xmlns:r="http://schemas.openxmlformats.org/officeDocument/2006/relationships" xmlns:p="http://schemas.openxmlformats.org/presentationml/2006/main">
   <p:cSld>
     <p:spTree>
